--- a/01/ppt/01-1_수업_소개_v2.pptx
+++ b/01/ppt/01-1_수업_소개_v2.pptx
@@ -2395,6 +2395,10 @@
             <a:prstDash val="solid"/>
           </a:ln>
         </p:spPr>
+        <p:txBody xmlns:a="http://schemas.openxmlformats.org/drawingml/2006/main">
+          <a:bodyPr/>
+          <a:p/>
+        </p:txBody>
       </p:sp>
       <p:sp>
         <p:nvSpPr>
@@ -2612,6 +2616,10 @@
             <a:prstDash val="solid"/>
           </a:ln>
         </p:spPr>
+        <p:txBody xmlns:a="http://schemas.openxmlformats.org/drawingml/2006/main">
+          <a:bodyPr/>
+          <a:p/>
+        </p:txBody>
       </p:sp>
       <p:sp>
         <p:nvSpPr>
@@ -2732,7 +2740,7 @@
                 <a:ea typeface="IBM Plex Sans KR"/>
                 <a:cs typeface="IBM Plex Sans KR"/>
               </a:rPr>
-              <a:t>수업자료 1-1 p.1</a:t>
+              <a:t>교과서 01-1 · 1쪽</a:t>
             </a:r>
           </a:p>
         </p:txBody>
@@ -2796,6 +2804,10 @@
             <a:prstDash val="solid"/>
           </a:ln>
         </p:spPr>
+        <p:txBody xmlns:a="http://schemas.openxmlformats.org/drawingml/2006/main">
+          <a:bodyPr/>
+          <a:p/>
+        </p:txBody>
       </p:sp>
       <p:sp>
         <p:nvSpPr>
@@ -2978,6 +2990,10 @@
             <a:prstDash val="solid"/>
           </a:ln>
         </p:spPr>
+        <p:txBody xmlns:a="http://schemas.openxmlformats.org/drawingml/2006/main">
+          <a:bodyPr/>
+          <a:p/>
+        </p:txBody>
       </p:sp>
       <p:sp>
         <p:nvSpPr>
@@ -3160,7 +3176,7 @@
                 <a:ea typeface="IBM Plex Sans KR"/>
                 <a:cs typeface="IBM Plex Sans KR"/>
               </a:rPr>
-              <a:t>수업자료 1-1 p.24</a:t>
+              <a:t>교과서 01-1 · 24쪽</a:t>
             </a:r>
           </a:p>
         </p:txBody>
@@ -3290,6 +3306,10 @@
             <a:prstDash val="solid"/>
           </a:ln>
         </p:spPr>
+        <p:txBody xmlns:a="http://schemas.openxmlformats.org/drawingml/2006/main">
+          <a:bodyPr/>
+          <a:p/>
+        </p:txBody>
       </p:sp>
       <p:sp>
         <p:nvSpPr>
@@ -3445,6 +3465,10 @@
             <a:prstDash val="solid"/>
           </a:ln>
         </p:spPr>
+        <p:txBody xmlns:a="http://schemas.openxmlformats.org/drawingml/2006/main">
+          <a:bodyPr/>
+          <a:p/>
+        </p:txBody>
       </p:sp>
       <p:sp>
         <p:nvSpPr>
@@ -3542,6 +3566,10 @@
             <a:prstDash val="solid"/>
           </a:ln>
         </p:spPr>
+        <p:txBody xmlns:a="http://schemas.openxmlformats.org/drawingml/2006/main">
+          <a:bodyPr/>
+          <a:p/>
+        </p:txBody>
       </p:sp>
       <p:pic>
         <p:nvPicPr>
@@ -3849,6 +3877,10 @@
             <a:prstDash val="solid"/>
           </a:ln>
         </p:spPr>
+        <p:txBody xmlns:a="http://schemas.openxmlformats.org/drawingml/2006/main">
+          <a:bodyPr/>
+          <a:p/>
+        </p:txBody>
       </p:sp>
       <p:pic>
         <p:nvPicPr>
@@ -4156,6 +4188,10 @@
             <a:prstDash val="solid"/>
           </a:ln>
         </p:spPr>
+        <p:txBody xmlns:a="http://schemas.openxmlformats.org/drawingml/2006/main">
+          <a:bodyPr/>
+          <a:p/>
+        </p:txBody>
       </p:sp>
       <p:pic>
         <p:nvPicPr>
@@ -4551,7 +4587,7 @@
                 <a:ea typeface="IBM Plex Sans KR"/>
                 <a:cs typeface="IBM Plex Sans KR"/>
               </a:rPr>
-              <a:t>수업자료 1-1 pp.2, 7</a:t>
+              <a:t>교과서 01-1 · 2, 7쪽</a:t>
             </a:r>
           </a:p>
         </p:txBody>
@@ -4681,6 +4717,10 @@
             <a:prstDash val="solid"/>
           </a:ln>
         </p:spPr>
+        <p:txBody xmlns:a="http://schemas.openxmlformats.org/drawingml/2006/main">
+          <a:bodyPr/>
+          <a:p/>
+        </p:txBody>
       </p:sp>
       <p:sp>
         <p:nvSpPr>
@@ -4836,6 +4876,10 @@
             <a:prstDash val="solid"/>
           </a:ln>
         </p:spPr>
+        <p:txBody xmlns:a="http://schemas.openxmlformats.org/drawingml/2006/main">
+          <a:bodyPr/>
+          <a:p/>
+        </p:txBody>
       </p:sp>
       <p:sp>
         <p:nvSpPr>
@@ -4933,6 +4977,10 @@
             <a:prstDash val="solid"/>
           </a:ln>
         </p:spPr>
+        <p:txBody xmlns:a="http://schemas.openxmlformats.org/drawingml/2006/main">
+          <a:bodyPr/>
+          <a:p/>
+        </p:txBody>
       </p:sp>
       <p:sp>
         <p:nvSpPr>
@@ -4968,6 +5016,10 @@
             <a:prstDash val="solid"/>
           </a:ln>
         </p:spPr>
+        <p:txBody xmlns:a="http://schemas.openxmlformats.org/drawingml/2006/main">
+          <a:bodyPr/>
+          <a:p/>
+        </p:txBody>
       </p:sp>
       <p:sp>
         <p:nvSpPr>
@@ -5444,7 +5496,7 @@
                 <a:ea typeface="IBM Plex Sans KR"/>
                 <a:cs typeface="IBM Plex Sans KR"/>
               </a:rPr>
-              <a:t>수업자료 1-1 p.2</a:t>
+              <a:t>교과서 01-1 · 2쪽</a:t>
             </a:r>
           </a:p>
         </p:txBody>
@@ -5574,6 +5626,10 @@
             <a:prstDash val="solid"/>
           </a:ln>
         </p:spPr>
+        <p:txBody xmlns:a="http://schemas.openxmlformats.org/drawingml/2006/main">
+          <a:bodyPr/>
+          <a:p/>
+        </p:txBody>
       </p:sp>
       <p:sp>
         <p:nvSpPr>
@@ -5729,6 +5785,10 @@
             <a:prstDash val="solid"/>
           </a:ln>
         </p:spPr>
+        <p:txBody xmlns:a="http://schemas.openxmlformats.org/drawingml/2006/main">
+          <a:bodyPr/>
+          <a:p/>
+        </p:txBody>
       </p:sp>
       <p:sp>
         <p:nvSpPr>
@@ -5826,6 +5886,10 @@
             <a:prstDash val="solid"/>
           </a:ln>
         </p:spPr>
+        <p:txBody xmlns:a="http://schemas.openxmlformats.org/drawingml/2006/main">
+          <a:bodyPr/>
+          <a:p/>
+        </p:txBody>
       </p:sp>
       <p:sp>
         <p:nvSpPr>
@@ -5861,6 +5925,10 @@
             <a:prstDash val="solid"/>
           </a:ln>
         </p:spPr>
+        <p:txBody xmlns:a="http://schemas.openxmlformats.org/drawingml/2006/main">
+          <a:bodyPr/>
+          <a:p/>
+        </p:txBody>
       </p:sp>
       <p:sp>
         <p:nvSpPr>
@@ -6082,6 +6150,10 @@
             <a:prstDash val="solid"/>
           </a:ln>
         </p:spPr>
+        <p:txBody xmlns:a="http://schemas.openxmlformats.org/drawingml/2006/main">
+          <a:bodyPr/>
+          <a:p/>
+        </p:txBody>
       </p:sp>
       <p:sp>
         <p:nvSpPr>
@@ -6117,6 +6189,10 @@
             <a:prstDash val="solid"/>
           </a:ln>
         </p:spPr>
+        <p:txBody xmlns:a="http://schemas.openxmlformats.org/drawingml/2006/main">
+          <a:bodyPr/>
+          <a:p/>
+        </p:txBody>
       </p:sp>
       <p:sp>
         <p:nvSpPr>
@@ -6338,6 +6414,10 @@
             <a:prstDash val="solid"/>
           </a:ln>
         </p:spPr>
+        <p:txBody xmlns:a="http://schemas.openxmlformats.org/drawingml/2006/main">
+          <a:bodyPr/>
+          <a:p/>
+        </p:txBody>
       </p:sp>
       <p:sp>
         <p:nvSpPr>
@@ -6373,6 +6453,10 @@
             <a:prstDash val="solid"/>
           </a:ln>
         </p:spPr>
+        <p:txBody xmlns:a="http://schemas.openxmlformats.org/drawingml/2006/main">
+          <a:bodyPr/>
+          <a:p/>
+        </p:txBody>
       </p:sp>
       <p:sp>
         <p:nvSpPr>
@@ -6679,7 +6763,7 @@
                 <a:ea typeface="IBM Plex Sans KR"/>
                 <a:cs typeface="IBM Plex Sans KR"/>
               </a:rPr>
-              <a:t>수업자료 1-1 pp.3–5</a:t>
+              <a:t>교과서 01-1 · 3–5쪽</a:t>
             </a:r>
           </a:p>
         </p:txBody>
@@ -6809,6 +6893,10 @@
             <a:prstDash val="solid"/>
           </a:ln>
         </p:spPr>
+        <p:txBody xmlns:a="http://schemas.openxmlformats.org/drawingml/2006/main">
+          <a:bodyPr/>
+          <a:p/>
+        </p:txBody>
       </p:sp>
       <p:sp>
         <p:nvSpPr>
@@ -6964,6 +7052,10 @@
             <a:prstDash val="solid"/>
           </a:ln>
         </p:spPr>
+        <p:txBody xmlns:a="http://schemas.openxmlformats.org/drawingml/2006/main">
+          <a:bodyPr/>
+          <a:p/>
+        </p:txBody>
       </p:sp>
       <p:sp>
         <p:nvSpPr>
@@ -7061,6 +7153,10 @@
             <a:prstDash val="solid"/>
           </a:ln>
         </p:spPr>
+        <p:txBody xmlns:a="http://schemas.openxmlformats.org/drawingml/2006/main">
+          <a:bodyPr/>
+          <a:p/>
+        </p:txBody>
       </p:sp>
       <p:sp>
         <p:nvSpPr>
@@ -7344,6 +7440,10 @@
             <a:prstDash val="solid"/>
           </a:ln>
         </p:spPr>
+        <p:txBody xmlns:a="http://schemas.openxmlformats.org/drawingml/2006/main">
+          <a:bodyPr/>
+          <a:p/>
+        </p:txBody>
       </p:sp>
       <p:sp>
         <p:nvSpPr>
@@ -7627,6 +7727,10 @@
             <a:prstDash val="solid"/>
           </a:ln>
         </p:spPr>
+        <p:txBody xmlns:a="http://schemas.openxmlformats.org/drawingml/2006/main">
+          <a:bodyPr/>
+          <a:p/>
+        </p:txBody>
       </p:sp>
       <p:sp>
         <p:nvSpPr>
@@ -7910,6 +8014,10 @@
             <a:prstDash val="solid"/>
           </a:ln>
         </p:spPr>
+        <p:txBody xmlns:a="http://schemas.openxmlformats.org/drawingml/2006/main">
+          <a:bodyPr/>
+          <a:p/>
+        </p:txBody>
       </p:sp>
       <p:sp>
         <p:nvSpPr>
@@ -8193,6 +8301,10 @@
             <a:prstDash val="solid"/>
           </a:ln>
         </p:spPr>
+        <p:txBody xmlns:a="http://schemas.openxmlformats.org/drawingml/2006/main">
+          <a:bodyPr/>
+          <a:p/>
+        </p:txBody>
       </p:sp>
       <p:sp>
         <p:nvSpPr>
@@ -8313,7 +8425,7 @@
                 <a:ea typeface="IBM Plex Sans KR"/>
                 <a:cs typeface="IBM Plex Sans KR"/>
               </a:rPr>
-              <a:t>수업자료 1-1 pp.6–7</a:t>
+              <a:t>교과서 01-1 · 6–7쪽</a:t>
             </a:r>
           </a:p>
         </p:txBody>
@@ -8443,6 +8555,10 @@
             <a:prstDash val="solid"/>
           </a:ln>
         </p:spPr>
+        <p:txBody xmlns:a="http://schemas.openxmlformats.org/drawingml/2006/main">
+          <a:bodyPr/>
+          <a:p/>
+        </p:txBody>
       </p:sp>
       <p:sp>
         <p:nvSpPr>
@@ -8598,6 +8714,10 @@
             <a:prstDash val="solid"/>
           </a:ln>
         </p:spPr>
+        <p:txBody xmlns:a="http://schemas.openxmlformats.org/drawingml/2006/main">
+          <a:bodyPr/>
+          <a:p/>
+        </p:txBody>
       </p:sp>
       <p:sp>
         <p:nvSpPr>
@@ -8695,6 +8815,10 @@
             <a:prstDash val="solid"/>
           </a:ln>
         </p:spPr>
+        <p:txBody xmlns:a="http://schemas.openxmlformats.org/drawingml/2006/main">
+          <a:bodyPr/>
+          <a:p/>
+        </p:txBody>
       </p:sp>
       <p:sp>
         <p:nvSpPr>
@@ -8730,6 +8854,10 @@
             <a:prstDash val="solid"/>
           </a:ln>
         </p:spPr>
+        <p:txBody xmlns:a="http://schemas.openxmlformats.org/drawingml/2006/main">
+          <a:bodyPr/>
+          <a:p/>
+        </p:txBody>
       </p:sp>
       <p:sp>
         <p:nvSpPr>
@@ -9206,7 +9334,7 @@
                 <a:ea typeface="IBM Plex Sans KR"/>
                 <a:cs typeface="IBM Plex Sans KR"/>
               </a:rPr>
-              <a:t>수업자료 1-1 p.8</a:t>
+              <a:t>교과서 01-1 · 8쪽</a:t>
             </a:r>
           </a:p>
         </p:txBody>
@@ -9336,6 +9464,10 @@
             <a:prstDash val="solid"/>
           </a:ln>
         </p:spPr>
+        <p:txBody xmlns:a="http://schemas.openxmlformats.org/drawingml/2006/main">
+          <a:bodyPr/>
+          <a:p/>
+        </p:txBody>
       </p:sp>
       <p:sp>
         <p:nvSpPr>
@@ -9491,6 +9623,10 @@
             <a:prstDash val="solid"/>
           </a:ln>
         </p:spPr>
+        <p:txBody xmlns:a="http://schemas.openxmlformats.org/drawingml/2006/main">
+          <a:bodyPr/>
+          <a:p/>
+        </p:txBody>
       </p:sp>
       <p:sp>
         <p:nvSpPr>
@@ -9588,6 +9724,10 @@
             <a:prstDash val="solid"/>
           </a:ln>
         </p:spPr>
+        <p:txBody xmlns:a="http://schemas.openxmlformats.org/drawingml/2006/main">
+          <a:bodyPr/>
+          <a:p/>
+        </p:txBody>
       </p:sp>
       <p:sp>
         <p:nvSpPr>
@@ -9898,6 +10038,10 @@
             <a:prstDash val="solid"/>
           </a:ln>
         </p:spPr>
+        <p:txBody xmlns:a="http://schemas.openxmlformats.org/drawingml/2006/main">
+          <a:bodyPr/>
+          <a:p/>
+        </p:txBody>
       </p:sp>
       <p:sp>
         <p:nvSpPr>
@@ -10208,6 +10352,10 @@
             <a:prstDash val="solid"/>
           </a:ln>
         </p:spPr>
+        <p:txBody xmlns:a="http://schemas.openxmlformats.org/drawingml/2006/main">
+          <a:bodyPr/>
+          <a:p/>
+        </p:txBody>
       </p:sp>
       <p:sp>
         <p:nvSpPr>
@@ -10518,6 +10666,10 @@
             <a:prstDash val="solid"/>
           </a:ln>
         </p:spPr>
+        <p:txBody xmlns:a="http://schemas.openxmlformats.org/drawingml/2006/main">
+          <a:bodyPr/>
+          <a:p/>
+        </p:txBody>
       </p:sp>
       <p:sp>
         <p:nvSpPr>
@@ -10700,7 +10852,7 @@
                 <a:ea typeface="IBM Plex Sans KR"/>
                 <a:cs typeface="IBM Plex Sans KR"/>
               </a:rPr>
-              <a:t>수업자료 1-1 pp.9–12</a:t>
+              <a:t>교과서 01-1 · 9–12쪽</a:t>
             </a:r>
           </a:p>
         </p:txBody>
@@ -10830,6 +10982,10 @@
             <a:prstDash val="solid"/>
           </a:ln>
         </p:spPr>
+        <p:txBody xmlns:a="http://schemas.openxmlformats.org/drawingml/2006/main">
+          <a:bodyPr/>
+          <a:p/>
+        </p:txBody>
       </p:sp>
       <p:sp>
         <p:nvSpPr>
@@ -10985,6 +11141,10 @@
             <a:prstDash val="solid"/>
           </a:ln>
         </p:spPr>
+        <p:txBody xmlns:a="http://schemas.openxmlformats.org/drawingml/2006/main">
+          <a:bodyPr/>
+          <a:p/>
+        </p:txBody>
       </p:sp>
       <p:sp>
         <p:nvSpPr>
@@ -11082,6 +11242,10 @@
             <a:prstDash val="solid"/>
           </a:ln>
         </p:spPr>
+        <p:txBody xmlns:a="http://schemas.openxmlformats.org/drawingml/2006/main">
+          <a:bodyPr/>
+          <a:p/>
+        </p:txBody>
       </p:sp>
       <p:sp>
         <p:nvSpPr>
@@ -11117,6 +11281,10 @@
             <a:prstDash val="solid"/>
           </a:ln>
         </p:spPr>
+        <p:txBody xmlns:a="http://schemas.openxmlformats.org/drawingml/2006/main">
+          <a:bodyPr/>
+          <a:p/>
+        </p:txBody>
       </p:sp>
       <p:sp>
         <p:nvSpPr>
@@ -11365,6 +11533,10 @@
             <a:prstDash val="solid"/>
           </a:ln>
         </p:spPr>
+        <p:txBody xmlns:a="http://schemas.openxmlformats.org/drawingml/2006/main">
+          <a:bodyPr/>
+          <a:p/>
+        </p:txBody>
       </p:sp>
       <p:sp>
         <p:nvSpPr>
@@ -11400,6 +11572,10 @@
             <a:prstDash val="solid"/>
           </a:ln>
         </p:spPr>
+        <p:txBody xmlns:a="http://schemas.openxmlformats.org/drawingml/2006/main">
+          <a:bodyPr/>
+          <a:p/>
+        </p:txBody>
       </p:sp>
       <p:sp>
         <p:nvSpPr>
@@ -11675,6 +11851,10 @@
             <a:prstDash val="solid"/>
           </a:ln>
         </p:spPr>
+        <p:txBody xmlns:a="http://schemas.openxmlformats.org/drawingml/2006/main">
+          <a:bodyPr/>
+          <a:p/>
+        </p:txBody>
       </p:sp>
       <p:sp>
         <p:nvSpPr>
@@ -11710,6 +11890,10 @@
             <a:prstDash val="solid"/>
           </a:ln>
         </p:spPr>
+        <p:txBody xmlns:a="http://schemas.openxmlformats.org/drawingml/2006/main">
+          <a:bodyPr/>
+          <a:p/>
+        </p:txBody>
       </p:sp>
       <p:sp>
         <p:nvSpPr>
@@ -12016,7 +12200,7 @@
                 <a:ea typeface="IBM Plex Sans KR"/>
                 <a:cs typeface="IBM Plex Sans KR"/>
               </a:rPr>
-              <a:t>수업자료 1-1 pp.13–16</a:t>
+              <a:t>교과서 01-1 · 13–16쪽</a:t>
             </a:r>
           </a:p>
         </p:txBody>
@@ -12146,6 +12330,10 @@
             <a:prstDash val="solid"/>
           </a:ln>
         </p:spPr>
+        <p:txBody xmlns:a="http://schemas.openxmlformats.org/drawingml/2006/main">
+          <a:bodyPr/>
+          <a:p/>
+        </p:txBody>
       </p:sp>
       <p:sp>
         <p:nvSpPr>
@@ -12301,6 +12489,10 @@
             <a:prstDash val="solid"/>
           </a:ln>
         </p:spPr>
+        <p:txBody xmlns:a="http://schemas.openxmlformats.org/drawingml/2006/main">
+          <a:bodyPr/>
+          <a:p/>
+        </p:txBody>
       </p:sp>
       <p:sp>
         <p:nvSpPr>
@@ -12460,6 +12652,10 @@
             <a:prstDash val="solid"/>
           </a:ln>
         </p:spPr>
+        <p:txBody xmlns:a="http://schemas.openxmlformats.org/drawingml/2006/main">
+          <a:bodyPr/>
+          <a:p/>
+        </p:txBody>
       </p:sp>
       <p:sp>
         <p:nvSpPr>
@@ -12619,6 +12815,10 @@
             <a:prstDash val="solid"/>
           </a:ln>
         </p:spPr>
+        <p:txBody xmlns:a="http://schemas.openxmlformats.org/drawingml/2006/main">
+          <a:bodyPr/>
+          <a:p/>
+        </p:txBody>
       </p:sp>
       <p:sp>
         <p:nvSpPr>
@@ -12778,6 +12978,10 @@
             <a:prstDash val="solid"/>
           </a:ln>
         </p:spPr>
+        <p:txBody xmlns:a="http://schemas.openxmlformats.org/drawingml/2006/main">
+          <a:bodyPr/>
+          <a:p/>
+        </p:txBody>
       </p:sp>
       <p:sp>
         <p:nvSpPr>
@@ -12937,6 +13141,10 @@
             <a:prstDash val="solid"/>
           </a:ln>
         </p:spPr>
+        <p:txBody xmlns:a="http://schemas.openxmlformats.org/drawingml/2006/main">
+          <a:bodyPr/>
+          <a:p/>
+        </p:txBody>
       </p:sp>
       <p:sp>
         <p:nvSpPr>
@@ -13181,7 +13389,7 @@
                 <a:ea typeface="IBM Plex Sans KR"/>
                 <a:cs typeface="IBM Plex Sans KR"/>
               </a:rPr>
-              <a:t>수업자료 1-1 pp.17–20</a:t>
+              <a:t>교과서 01-1 · 17–20쪽</a:t>
             </a:r>
           </a:p>
         </p:txBody>
